--- a/output/cross_stage_concordance/supplement_all_stage_nonnegative_ridge.pptx
+++ b/output/cross_stage_concordance/supplement_all_stage_nonnegative_ridge.pptx
@@ -7,7 +7,7 @@
   <p:sldIdLst>
     <p:sldId id="256" r:id="rId8"/>
   </p:sldIdLst>
-  <p:sldSz cx="9144000" cy="6858000" type="screen4x3"/>
+  <p:sldSz cx="6400800" cy="5852160" type="screen4x3"/>
   <p:notesSz cx="6858000" cy="9144000"/>
   <p:custDataLst>
     <p:tags r:id="rId3"/>
@@ -2271,8 +2271,8 @@
           </p:nvSpPr>
           <p:spPr>
             <a:xfrm>
-              <a:off x="744102" y="0"/>
-              <a:ext cx="4912594" cy="5852160"/>
+              <a:off x="742136" y="0"/>
+              <a:ext cx="4916526" cy="5852160"/>
             </a:xfrm>
             <a:prstGeom prst="rect">
               <a:avLst/>
@@ -2297,8 +2297,8 @@
           </p:nvSpPr>
           <p:spPr>
             <a:xfrm>
-              <a:off x="1194397" y="1030002"/>
-              <a:ext cx="4392710" cy="4392710"/>
+              <a:off x="1237877" y="1030002"/>
+              <a:ext cx="4351197" cy="4351197"/>
             </a:xfrm>
             <a:prstGeom prst="rect">
               <a:avLst/>
@@ -2323,8 +2323,8 @@
           </p:nvSpPr>
           <p:spPr>
             <a:xfrm>
-              <a:off x="1265247" y="4643361"/>
-              <a:ext cx="708501" cy="708501"/>
+              <a:off x="1308057" y="4609213"/>
+              <a:ext cx="701805" cy="701805"/>
             </a:xfrm>
             <a:prstGeom prst="rect">
               <a:avLst/>
@@ -2358,8 +2358,8 @@
           </p:nvSpPr>
           <p:spPr>
             <a:xfrm>
-              <a:off x="1973749" y="4643361"/>
-              <a:ext cx="708501" cy="708501"/>
+              <a:off x="2009863" y="4609213"/>
+              <a:ext cx="701805" cy="701805"/>
             </a:xfrm>
             <a:prstGeom prst="rect">
               <a:avLst/>
@@ -2393,8 +2393,8 @@
           </p:nvSpPr>
           <p:spPr>
             <a:xfrm>
-              <a:off x="2682251" y="4643361"/>
-              <a:ext cx="708501" cy="708501"/>
+              <a:off x="2711669" y="4609213"/>
+              <a:ext cx="701805" cy="701805"/>
             </a:xfrm>
             <a:prstGeom prst="rect">
               <a:avLst/>
@@ -2428,8 +2428,8 @@
           </p:nvSpPr>
           <p:spPr>
             <a:xfrm>
-              <a:off x="3390752" y="4643361"/>
-              <a:ext cx="708501" cy="708501"/>
+              <a:off x="3413475" y="4609213"/>
+              <a:ext cx="701805" cy="701805"/>
             </a:xfrm>
             <a:prstGeom prst="rect">
               <a:avLst/>
@@ -2463,8 +2463,8 @@
           </p:nvSpPr>
           <p:spPr>
             <a:xfrm>
-              <a:off x="4099254" y="4643361"/>
-              <a:ext cx="708501" cy="708501"/>
+              <a:off x="4115281" y="4609213"/>
+              <a:ext cx="701805" cy="701805"/>
             </a:xfrm>
             <a:prstGeom prst="rect">
               <a:avLst/>
@@ -2498,8 +2498,8 @@
           </p:nvSpPr>
           <p:spPr>
             <a:xfrm>
-              <a:off x="4807756" y="4643361"/>
-              <a:ext cx="708501" cy="708501"/>
+              <a:off x="4817087" y="4609213"/>
+              <a:ext cx="701805" cy="701805"/>
             </a:xfrm>
             <a:prstGeom prst="rect">
               <a:avLst/>
@@ -2533,8 +2533,8 @@
           </p:nvSpPr>
           <p:spPr>
             <a:xfrm>
-              <a:off x="1265247" y="3934859"/>
-              <a:ext cx="708501" cy="708501"/>
+              <a:off x="1308057" y="3907407"/>
+              <a:ext cx="701805" cy="701805"/>
             </a:xfrm>
             <a:prstGeom prst="rect">
               <a:avLst/>
@@ -2568,8 +2568,8 @@
           </p:nvSpPr>
           <p:spPr>
             <a:xfrm>
-              <a:off x="1973749" y="3934859"/>
-              <a:ext cx="708501" cy="708501"/>
+              <a:off x="2009863" y="3907407"/>
+              <a:ext cx="701805" cy="701805"/>
             </a:xfrm>
             <a:prstGeom prst="rect">
               <a:avLst/>
@@ -2603,8 +2603,8 @@
           </p:nvSpPr>
           <p:spPr>
             <a:xfrm>
-              <a:off x="2682251" y="3934859"/>
-              <a:ext cx="708501" cy="708501"/>
+              <a:off x="2711669" y="3907407"/>
+              <a:ext cx="701805" cy="701805"/>
             </a:xfrm>
             <a:prstGeom prst="rect">
               <a:avLst/>
@@ -2638,8 +2638,8 @@
           </p:nvSpPr>
           <p:spPr>
             <a:xfrm>
-              <a:off x="3390752" y="3934859"/>
-              <a:ext cx="708501" cy="708501"/>
+              <a:off x="3413475" y="3907407"/>
+              <a:ext cx="701805" cy="701805"/>
             </a:xfrm>
             <a:prstGeom prst="rect">
               <a:avLst/>
@@ -2673,8 +2673,8 @@
           </p:nvSpPr>
           <p:spPr>
             <a:xfrm>
-              <a:off x="4099254" y="3934859"/>
-              <a:ext cx="708501" cy="708501"/>
+              <a:off x="4115281" y="3907407"/>
+              <a:ext cx="701805" cy="701805"/>
             </a:xfrm>
             <a:prstGeom prst="rect">
               <a:avLst/>
@@ -2708,8 +2708,8 @@
           </p:nvSpPr>
           <p:spPr>
             <a:xfrm>
-              <a:off x="4807756" y="3934859"/>
-              <a:ext cx="708501" cy="708501"/>
+              <a:off x="4817087" y="3907407"/>
+              <a:ext cx="701805" cy="701805"/>
             </a:xfrm>
             <a:prstGeom prst="rect">
               <a:avLst/>
@@ -2743,8 +2743,8 @@
           </p:nvSpPr>
           <p:spPr>
             <a:xfrm>
-              <a:off x="1265247" y="3226358"/>
-              <a:ext cx="708501" cy="708501"/>
+              <a:off x="1308057" y="3205601"/>
+              <a:ext cx="701805" cy="701805"/>
             </a:xfrm>
             <a:prstGeom prst="rect">
               <a:avLst/>
@@ -2778,8 +2778,8 @@
           </p:nvSpPr>
           <p:spPr>
             <a:xfrm>
-              <a:off x="1973749" y="3226358"/>
-              <a:ext cx="708501" cy="708501"/>
+              <a:off x="2009863" y="3205601"/>
+              <a:ext cx="701805" cy="701805"/>
             </a:xfrm>
             <a:prstGeom prst="rect">
               <a:avLst/>
@@ -2813,8 +2813,8 @@
           </p:nvSpPr>
           <p:spPr>
             <a:xfrm>
-              <a:off x="2682251" y="3226358"/>
-              <a:ext cx="708501" cy="708501"/>
+              <a:off x="2711669" y="3205601"/>
+              <a:ext cx="701805" cy="701805"/>
             </a:xfrm>
             <a:prstGeom prst="rect">
               <a:avLst/>
@@ -2848,8 +2848,8 @@
           </p:nvSpPr>
           <p:spPr>
             <a:xfrm>
-              <a:off x="3390752" y="3226358"/>
-              <a:ext cx="708501" cy="708501"/>
+              <a:off x="3413475" y="3205601"/>
+              <a:ext cx="701805" cy="701805"/>
             </a:xfrm>
             <a:prstGeom prst="rect">
               <a:avLst/>
@@ -2883,8 +2883,8 @@
           </p:nvSpPr>
           <p:spPr>
             <a:xfrm>
-              <a:off x="4099254" y="3226358"/>
-              <a:ext cx="708501" cy="708501"/>
+              <a:off x="4115281" y="3205601"/>
+              <a:ext cx="701805" cy="701805"/>
             </a:xfrm>
             <a:prstGeom prst="rect">
               <a:avLst/>
@@ -2918,8 +2918,8 @@
           </p:nvSpPr>
           <p:spPr>
             <a:xfrm>
-              <a:off x="4807756" y="3226358"/>
-              <a:ext cx="708501" cy="708501"/>
+              <a:off x="4817087" y="3205601"/>
+              <a:ext cx="701805" cy="701805"/>
             </a:xfrm>
             <a:prstGeom prst="rect">
               <a:avLst/>
@@ -2953,8 +2953,8 @@
           </p:nvSpPr>
           <p:spPr>
             <a:xfrm>
-              <a:off x="1265247" y="2517856"/>
-              <a:ext cx="708501" cy="708501"/>
+              <a:off x="1308057" y="2503795"/>
+              <a:ext cx="701805" cy="701805"/>
             </a:xfrm>
             <a:prstGeom prst="rect">
               <a:avLst/>
@@ -2988,8 +2988,8 @@
           </p:nvSpPr>
           <p:spPr>
             <a:xfrm>
-              <a:off x="1973749" y="2517856"/>
-              <a:ext cx="708501" cy="708501"/>
+              <a:off x="2009863" y="2503795"/>
+              <a:ext cx="701805" cy="701805"/>
             </a:xfrm>
             <a:prstGeom prst="rect">
               <a:avLst/>
@@ -3023,8 +3023,8 @@
           </p:nvSpPr>
           <p:spPr>
             <a:xfrm>
-              <a:off x="2682251" y="2517856"/>
-              <a:ext cx="708501" cy="708501"/>
+              <a:off x="2711669" y="2503795"/>
+              <a:ext cx="701805" cy="701805"/>
             </a:xfrm>
             <a:prstGeom prst="rect">
               <a:avLst/>
@@ -3058,8 +3058,8 @@
           </p:nvSpPr>
           <p:spPr>
             <a:xfrm>
-              <a:off x="3390752" y="2517856"/>
-              <a:ext cx="708501" cy="708501"/>
+              <a:off x="3413475" y="2503795"/>
+              <a:ext cx="701805" cy="701805"/>
             </a:xfrm>
             <a:prstGeom prst="rect">
               <a:avLst/>
@@ -3093,8 +3093,8 @@
           </p:nvSpPr>
           <p:spPr>
             <a:xfrm>
-              <a:off x="4099254" y="2517856"/>
-              <a:ext cx="708501" cy="708501"/>
+              <a:off x="4115281" y="2503795"/>
+              <a:ext cx="701805" cy="701805"/>
             </a:xfrm>
             <a:prstGeom prst="rect">
               <a:avLst/>
@@ -3128,8 +3128,8 @@
           </p:nvSpPr>
           <p:spPr>
             <a:xfrm>
-              <a:off x="4807756" y="2517856"/>
-              <a:ext cx="708501" cy="708501"/>
+              <a:off x="4817087" y="2503795"/>
+              <a:ext cx="701805" cy="701805"/>
             </a:xfrm>
             <a:prstGeom prst="rect">
               <a:avLst/>
@@ -3163,8 +3163,8 @@
           </p:nvSpPr>
           <p:spPr>
             <a:xfrm>
-              <a:off x="1265247" y="1809354"/>
-              <a:ext cx="708501" cy="708501"/>
+              <a:off x="1308057" y="1801989"/>
+              <a:ext cx="701805" cy="701805"/>
             </a:xfrm>
             <a:prstGeom prst="rect">
               <a:avLst/>
@@ -3198,8 +3198,8 @@
           </p:nvSpPr>
           <p:spPr>
             <a:xfrm>
-              <a:off x="1973749" y="1809354"/>
-              <a:ext cx="708501" cy="708501"/>
+              <a:off x="2009863" y="1801989"/>
+              <a:ext cx="701805" cy="701805"/>
             </a:xfrm>
             <a:prstGeom prst="rect">
               <a:avLst/>
@@ -3233,8 +3233,8 @@
           </p:nvSpPr>
           <p:spPr>
             <a:xfrm>
-              <a:off x="2682251" y="1809354"/>
-              <a:ext cx="708501" cy="708501"/>
+              <a:off x="2711669" y="1801989"/>
+              <a:ext cx="701805" cy="701805"/>
             </a:xfrm>
             <a:prstGeom prst="rect">
               <a:avLst/>
@@ -3268,8 +3268,8 @@
           </p:nvSpPr>
           <p:spPr>
             <a:xfrm>
-              <a:off x="3390752" y="1809354"/>
-              <a:ext cx="708501" cy="708501"/>
+              <a:off x="3413475" y="1801989"/>
+              <a:ext cx="701805" cy="701805"/>
             </a:xfrm>
             <a:prstGeom prst="rect">
               <a:avLst/>
@@ -3303,8 +3303,8 @@
           </p:nvSpPr>
           <p:spPr>
             <a:xfrm>
-              <a:off x="4099254" y="1809354"/>
-              <a:ext cx="708501" cy="708501"/>
+              <a:off x="4115281" y="1801989"/>
+              <a:ext cx="701805" cy="701805"/>
             </a:xfrm>
             <a:prstGeom prst="rect">
               <a:avLst/>
@@ -3338,8 +3338,8 @@
           </p:nvSpPr>
           <p:spPr>
             <a:xfrm>
-              <a:off x="4807756" y="1809354"/>
-              <a:ext cx="708501" cy="708501"/>
+              <a:off x="4817087" y="1801989"/>
+              <a:ext cx="701805" cy="701805"/>
             </a:xfrm>
             <a:prstGeom prst="rect">
               <a:avLst/>
@@ -3373,8 +3373,8 @@
           </p:nvSpPr>
           <p:spPr>
             <a:xfrm>
-              <a:off x="1265247" y="1100852"/>
-              <a:ext cx="708501" cy="708501"/>
+              <a:off x="1308057" y="1100183"/>
+              <a:ext cx="701805" cy="701805"/>
             </a:xfrm>
             <a:prstGeom prst="rect">
               <a:avLst/>
@@ -3408,8 +3408,8 @@
           </p:nvSpPr>
           <p:spPr>
             <a:xfrm>
-              <a:off x="1973749" y="1100852"/>
-              <a:ext cx="708501" cy="708501"/>
+              <a:off x="2009863" y="1100183"/>
+              <a:ext cx="701805" cy="701805"/>
             </a:xfrm>
             <a:prstGeom prst="rect">
               <a:avLst/>
@@ -3443,8 +3443,8 @@
           </p:nvSpPr>
           <p:spPr>
             <a:xfrm>
-              <a:off x="2682251" y="1100852"/>
-              <a:ext cx="708501" cy="708501"/>
+              <a:off x="2711669" y="1100183"/>
+              <a:ext cx="701805" cy="701805"/>
             </a:xfrm>
             <a:prstGeom prst="rect">
               <a:avLst/>
@@ -3478,8 +3478,8 @@
           </p:nvSpPr>
           <p:spPr>
             <a:xfrm>
-              <a:off x="3390752" y="1100852"/>
-              <a:ext cx="708501" cy="708501"/>
+              <a:off x="3413475" y="1100183"/>
+              <a:ext cx="701805" cy="701805"/>
             </a:xfrm>
             <a:prstGeom prst="rect">
               <a:avLst/>
@@ -3513,8 +3513,8 @@
           </p:nvSpPr>
           <p:spPr>
             <a:xfrm>
-              <a:off x="4099254" y="1100852"/>
-              <a:ext cx="708501" cy="708501"/>
+              <a:off x="4115281" y="1100183"/>
+              <a:ext cx="701805" cy="701805"/>
             </a:xfrm>
             <a:prstGeom prst="rect">
               <a:avLst/>
@@ -3548,8 +3548,8 @@
           </p:nvSpPr>
           <p:spPr>
             <a:xfrm>
-              <a:off x="4807756" y="1100852"/>
-              <a:ext cx="708501" cy="708501"/>
+              <a:off x="4817087" y="1100183"/>
+              <a:ext cx="701805" cy="701805"/>
             </a:xfrm>
             <a:prstGeom prst="rect">
               <a:avLst/>
@@ -3583,8 +3583,8 @@
           </p:nvSpPr>
           <p:spPr>
             <a:xfrm>
-              <a:off x="1591380" y="4237401"/>
-              <a:ext cx="56235" cy="103418"/>
+              <a:off x="5134249" y="4898028"/>
+              <a:ext cx="67482" cy="124175"/>
             </a:xfrm>
             <a:prstGeom prst="rect">
               <a:avLst/>
@@ -3604,7 +3604,7 @@
                 </a:spcAft>
               </a:pPr>
               <a:r>
-                <a:rPr sz="1138" i="0" b="0">
+                <a:rPr sz="1365" i="0" b="0">
                   <a:solidFill>
                     <a:srgbClr val="000000">
                       <a:alpha val="100000"/>
@@ -3626,8 +3626,8 @@
           </p:nvSpPr>
           <p:spPr>
             <a:xfrm>
-              <a:off x="2307929" y="4237401"/>
-              <a:ext cx="40142" cy="103418"/>
+              <a:off x="1591478" y="4196222"/>
+              <a:ext cx="134965" cy="124175"/>
             </a:xfrm>
             <a:prstGeom prst="rect">
               <a:avLst/>
@@ -3647,7 +3647,7 @@
                 </a:spcAft>
               </a:pPr>
               <a:r>
-                <a:rPr sz="1138" i="0" b="0">
+                <a:rPr sz="1365" i="0" b="0">
                   <a:solidFill>
                     <a:srgbClr val="000000">
                       <a:alpha val="100000"/>
@@ -3656,7 +3656,7 @@
                   <a:latin typeface="Arial"/>
                   <a:cs typeface="Arial"/>
                 </a:rPr>
-                <a:t>.</a:t>
+                <a:t>**</a:t>
               </a:r>
             </a:p>
           </p:txBody>
@@ -3669,8 +3669,8 @@
           </p:nvSpPr>
           <p:spPr>
             <a:xfrm>
-              <a:off x="3716885" y="4237401"/>
-              <a:ext cx="56235" cy="103418"/>
+              <a:off x="2327025" y="4196222"/>
+              <a:ext cx="67482" cy="124175"/>
             </a:xfrm>
             <a:prstGeom prst="rect">
               <a:avLst/>
@@ -3690,7 +3690,7 @@
                 </a:spcAft>
               </a:pPr>
               <a:r>
-                <a:rPr sz="1138" i="0" b="0">
+                <a:rPr sz="1365" i="0" b="0">
                   <a:solidFill>
                     <a:srgbClr val="000000">
                       <a:alpha val="100000"/>
@@ -3712,8 +3712,8 @@
           </p:nvSpPr>
           <p:spPr>
             <a:xfrm>
-              <a:off x="2299882" y="3528899"/>
-              <a:ext cx="56235" cy="103418"/>
+              <a:off x="3696896" y="4196222"/>
+              <a:ext cx="134965" cy="124175"/>
             </a:xfrm>
             <a:prstGeom prst="rect">
               <a:avLst/>
@@ -3733,7 +3733,93 @@
                 </a:spcAft>
               </a:pPr>
               <a:r>
-                <a:rPr sz="1138" i="0" b="0">
+                <a:rPr sz="1365" i="0" b="0">
+                  <a:solidFill>
+                    <a:srgbClr val="000000">
+                      <a:alpha val="100000"/>
+                    </a:srgbClr>
+                  </a:solidFill>
+                  <a:latin typeface="Arial"/>
+                  <a:cs typeface="Arial"/>
+                </a:rPr>
+                <a:t>**</a:t>
+              </a:r>
+            </a:p>
+          </p:txBody>
+        </p:sp>
+        <p:sp>
+          <p:nvSpPr>
+            <p:cNvPr id="46" name="tx46"/>
+            <p:cNvSpPr/>
+            <p:nvPr/>
+          </p:nvSpPr>
+          <p:spPr>
+            <a:xfrm>
+              <a:off x="2293284" y="3494416"/>
+              <a:ext cx="134965" cy="124175"/>
+            </a:xfrm>
+            <a:prstGeom prst="rect">
+              <a:avLst/>
+            </a:prstGeom>
+            <a:noFill/>
+          </p:spPr>
+          <p:txBody>
+            <a:bodyPr lIns="0" rIns="0" tIns="0" bIns="0" anchorCtr="1" anchor="ctr" wrap="none"/>
+            <a:lstStyle/>
+            <a:p>
+              <a:pPr algn="l" marL="0" marR="0" indent="0">
+                <a:spcBef>
+                  <a:spcPts val="0"/>
+                </a:spcBef>
+                <a:spcAft>
+                  <a:spcPts val="0"/>
+                </a:spcAft>
+              </a:pPr>
+              <a:r>
+                <a:rPr sz="1365" i="0" b="0">
+                  <a:solidFill>
+                    <a:srgbClr val="000000">
+                      <a:alpha val="100000"/>
+                    </a:srgbClr>
+                  </a:solidFill>
+                  <a:latin typeface="Arial"/>
+                  <a:cs typeface="Arial"/>
+                </a:rPr>
+                <a:t>**</a:t>
+              </a:r>
+            </a:p>
+          </p:txBody>
+        </p:sp>
+        <p:sp>
+          <p:nvSpPr>
+            <p:cNvPr id="47" name="tx47"/>
+            <p:cNvSpPr/>
+            <p:nvPr/>
+          </p:nvSpPr>
+          <p:spPr>
+            <a:xfrm>
+              <a:off x="3028831" y="3494416"/>
+              <a:ext cx="67482" cy="124175"/>
+            </a:xfrm>
+            <a:prstGeom prst="rect">
+              <a:avLst/>
+            </a:prstGeom>
+            <a:noFill/>
+          </p:spPr>
+          <p:txBody>
+            <a:bodyPr lIns="0" rIns="0" tIns="0" bIns="0" anchorCtr="1" anchor="ctr" wrap="none"/>
+            <a:lstStyle/>
+            <a:p>
+              <a:pPr algn="l" marL="0" marR="0" indent="0">
+                <a:spcBef>
+                  <a:spcPts val="0"/>
+                </a:spcBef>
+                <a:spcAft>
+                  <a:spcPts val="0"/>
+                </a:spcAft>
+              </a:pPr>
+              <a:r>
+                <a:rPr sz="1365" i="0" b="0">
                   <a:solidFill>
                     <a:srgbClr val="000000">
                       <a:alpha val="100000"/>
@@ -3749,14 +3835,14 @@
         </p:sp>
         <p:sp>
           <p:nvSpPr>
-            <p:cNvPr id="46" name="tx46"/>
-            <p:cNvSpPr/>
-            <p:nvPr/>
-          </p:nvSpPr>
-          <p:spPr>
-            <a:xfrm>
-              <a:off x="5133889" y="1403394"/>
-              <a:ext cx="56235" cy="103418"/>
+            <p:cNvPr id="48" name="tx48"/>
+            <p:cNvSpPr/>
+            <p:nvPr/>
+          </p:nvSpPr>
+          <p:spPr>
+            <a:xfrm>
+              <a:off x="2327025" y="2792610"/>
+              <a:ext cx="67482" cy="124175"/>
             </a:xfrm>
             <a:prstGeom prst="rect">
               <a:avLst/>
@@ -3776,7 +3862,7 @@
                 </a:spcAft>
               </a:pPr>
               <a:r>
-                <a:rPr sz="1138" i="0" b="0">
+                <a:rPr sz="1365" i="0" b="0">
                   <a:solidFill>
                     <a:srgbClr val="000000">
                       <a:alpha val="100000"/>
@@ -3792,14 +3878,14 @@
         </p:sp>
         <p:sp>
           <p:nvSpPr>
-            <p:cNvPr id="47" name="tx47"/>
-            <p:cNvSpPr/>
-            <p:nvPr/>
-          </p:nvSpPr>
-          <p:spPr>
-            <a:xfrm>
-              <a:off x="1007408" y="4957607"/>
-              <a:ext cx="124358" cy="80010"/>
+            <p:cNvPr id="49" name="tx49"/>
+            <p:cNvSpPr/>
+            <p:nvPr/>
+          </p:nvSpPr>
+          <p:spPr>
+            <a:xfrm>
+              <a:off x="5100507" y="1388998"/>
+              <a:ext cx="134965" cy="124175"/>
             </a:xfrm>
             <a:prstGeom prst="rect">
               <a:avLst/>
@@ -3819,7 +3905,50 @@
                 </a:spcAft>
               </a:pPr>
               <a:r>
-                <a:rPr sz="880" i="0" b="0">
+                <a:rPr sz="1365" i="0" b="0">
+                  <a:solidFill>
+                    <a:srgbClr val="000000">
+                      <a:alpha val="100000"/>
+                    </a:srgbClr>
+                  </a:solidFill>
+                  <a:latin typeface="Arial"/>
+                  <a:cs typeface="Arial"/>
+                </a:rPr>
+                <a:t>**</a:t>
+              </a:r>
+            </a:p>
+          </p:txBody>
+        </p:sp>
+        <p:sp>
+          <p:nvSpPr>
+            <p:cNvPr id="50" name="tx50"/>
+            <p:cNvSpPr/>
+            <p:nvPr/>
+          </p:nvSpPr>
+          <p:spPr>
+            <a:xfrm>
+              <a:off x="1026931" y="4912384"/>
+              <a:ext cx="148315" cy="95463"/>
+            </a:xfrm>
+            <a:prstGeom prst="rect">
+              <a:avLst/>
+            </a:prstGeom>
+            <a:noFill/>
+          </p:spPr>
+          <p:txBody>
+            <a:bodyPr lIns="0" rIns="0" tIns="0" bIns="0" anchorCtr="1" anchor="ctr" wrap="none"/>
+            <a:lstStyle/>
+            <a:p>
+              <a:pPr algn="l" marL="0" marR="0" indent="0">
+                <a:spcBef>
+                  <a:spcPts val="0"/>
+                </a:spcBef>
+                <a:spcAft>
+                  <a:spcPts val="0"/>
+                </a:spcAft>
+              </a:pPr>
+              <a:r>
+                <a:rPr sz="1050" i="0" b="0">
                   <a:solidFill>
                     <a:srgbClr val="000000">
                       <a:alpha val="100000"/>
@@ -3835,14 +3964,14 @@
         </p:sp>
         <p:sp>
           <p:nvSpPr>
-            <p:cNvPr id="48" name="tx48"/>
-            <p:cNvSpPr/>
-            <p:nvPr/>
-          </p:nvSpPr>
-          <p:spPr>
-            <a:xfrm>
-              <a:off x="1007408" y="4249105"/>
-              <a:ext cx="124358" cy="80010"/>
+            <p:cNvPr id="51" name="tx51"/>
+            <p:cNvSpPr/>
+            <p:nvPr/>
+          </p:nvSpPr>
+          <p:spPr>
+            <a:xfrm>
+              <a:off x="1026931" y="4210578"/>
+              <a:ext cx="148315" cy="95463"/>
             </a:xfrm>
             <a:prstGeom prst="rect">
               <a:avLst/>
@@ -3862,7 +3991,7 @@
                 </a:spcAft>
               </a:pPr>
               <a:r>
-                <a:rPr sz="880" i="0" b="0">
+                <a:rPr sz="1050" i="0" b="0">
                   <a:solidFill>
                     <a:srgbClr val="000000">
                       <a:alpha val="100000"/>
@@ -3878,14 +4007,14 @@
         </p:sp>
         <p:sp>
           <p:nvSpPr>
-            <p:cNvPr id="49" name="tx49"/>
-            <p:cNvSpPr/>
-            <p:nvPr/>
-          </p:nvSpPr>
-          <p:spPr>
-            <a:xfrm>
-              <a:off x="1007408" y="3540603"/>
-              <a:ext cx="124358" cy="80010"/>
+            <p:cNvPr id="52" name="tx52"/>
+            <p:cNvSpPr/>
+            <p:nvPr/>
+          </p:nvSpPr>
+          <p:spPr>
+            <a:xfrm>
+              <a:off x="1026931" y="3508772"/>
+              <a:ext cx="148315" cy="95463"/>
             </a:xfrm>
             <a:prstGeom prst="rect">
               <a:avLst/>
@@ -3905,7 +4034,7 @@
                 </a:spcAft>
               </a:pPr>
               <a:r>
-                <a:rPr sz="880" i="0" b="0">
+                <a:rPr sz="1050" i="0" b="0">
                   <a:solidFill>
                     <a:srgbClr val="000000">
                       <a:alpha val="100000"/>
@@ -3921,14 +4050,14 @@
         </p:sp>
         <p:sp>
           <p:nvSpPr>
-            <p:cNvPr id="50" name="tx50"/>
-            <p:cNvSpPr/>
-            <p:nvPr/>
-          </p:nvSpPr>
-          <p:spPr>
-            <a:xfrm>
-              <a:off x="1007408" y="2832102"/>
-              <a:ext cx="124358" cy="80010"/>
+            <p:cNvPr id="53" name="tx53"/>
+            <p:cNvSpPr/>
+            <p:nvPr/>
+          </p:nvSpPr>
+          <p:spPr>
+            <a:xfrm>
+              <a:off x="1026931" y="2806966"/>
+              <a:ext cx="148315" cy="95463"/>
             </a:xfrm>
             <a:prstGeom prst="rect">
               <a:avLst/>
@@ -3948,7 +4077,7 @@
                 </a:spcAft>
               </a:pPr>
               <a:r>
-                <a:rPr sz="880" i="0" b="0">
+                <a:rPr sz="1050" i="0" b="0">
                   <a:solidFill>
                     <a:srgbClr val="000000">
                       <a:alpha val="100000"/>
@@ -3964,14 +4093,14 @@
         </p:sp>
         <p:sp>
           <p:nvSpPr>
-            <p:cNvPr id="51" name="tx51"/>
-            <p:cNvSpPr/>
-            <p:nvPr/>
-          </p:nvSpPr>
-          <p:spPr>
-            <a:xfrm>
-              <a:off x="1007408" y="2123600"/>
-              <a:ext cx="124358" cy="80010"/>
+            <p:cNvPr id="54" name="tx54"/>
+            <p:cNvSpPr/>
+            <p:nvPr/>
+          </p:nvSpPr>
+          <p:spPr>
+            <a:xfrm>
+              <a:off x="1026931" y="2105160"/>
+              <a:ext cx="148315" cy="95463"/>
             </a:xfrm>
             <a:prstGeom prst="rect">
               <a:avLst/>
@@ -3991,7 +4120,7 @@
                 </a:spcAft>
               </a:pPr>
               <a:r>
-                <a:rPr sz="880" i="0" b="0">
+                <a:rPr sz="1050" i="0" b="0">
                   <a:solidFill>
                     <a:srgbClr val="000000">
                       <a:alpha val="100000"/>
@@ -4007,14 +4136,14 @@
         </p:sp>
         <p:sp>
           <p:nvSpPr>
-            <p:cNvPr id="52" name="tx52"/>
-            <p:cNvSpPr/>
-            <p:nvPr/>
-          </p:nvSpPr>
-          <p:spPr>
-            <a:xfrm>
-              <a:off x="1057243" y="1415098"/>
-              <a:ext cx="74523" cy="80010"/>
+            <p:cNvPr id="55" name="tx55"/>
+            <p:cNvSpPr/>
+            <p:nvPr/>
+          </p:nvSpPr>
+          <p:spPr>
+            <a:xfrm>
+              <a:off x="1086367" y="1403354"/>
+              <a:ext cx="88879" cy="95463"/>
             </a:xfrm>
             <a:prstGeom prst="rect">
               <a:avLst/>
@@ -4034,7 +4163,7 @@
                 </a:spcAft>
               </a:pPr>
               <a:r>
-                <a:rPr sz="880" i="0" b="0">
+                <a:rPr sz="1050" i="0" b="0">
                   <a:solidFill>
                     <a:srgbClr val="000000">
                       <a:alpha val="100000"/>
@@ -4050,14 +4179,14 @@
         </p:sp>
         <p:sp>
           <p:nvSpPr>
-            <p:cNvPr id="53" name="tx53"/>
-            <p:cNvSpPr/>
-            <p:nvPr/>
-          </p:nvSpPr>
-          <p:spPr>
-            <a:xfrm>
-              <a:off x="1557319" y="5485343"/>
-              <a:ext cx="124358" cy="80010"/>
+            <p:cNvPr id="56" name="tx56"/>
+            <p:cNvSpPr/>
+            <p:nvPr/>
+          </p:nvSpPr>
+          <p:spPr>
+            <a:xfrm>
+              <a:off x="1584802" y="5443829"/>
+              <a:ext cx="148315" cy="95463"/>
             </a:xfrm>
             <a:prstGeom prst="rect">
               <a:avLst/>
@@ -4077,7 +4206,7 @@
                 </a:spcAft>
               </a:pPr>
               <a:r>
-                <a:rPr sz="880" i="0" b="0">
+                <a:rPr sz="1050" i="0" b="0">
                   <a:solidFill>
                     <a:srgbClr val="000000">
                       <a:alpha val="100000"/>
@@ -4093,14 +4222,14 @@
         </p:sp>
         <p:sp>
           <p:nvSpPr>
-            <p:cNvPr id="54" name="tx54"/>
-            <p:cNvSpPr/>
-            <p:nvPr/>
-          </p:nvSpPr>
-          <p:spPr>
-            <a:xfrm>
-              <a:off x="2265821" y="5485343"/>
-              <a:ext cx="124358" cy="80010"/>
+            <p:cNvPr id="57" name="tx57"/>
+            <p:cNvSpPr/>
+            <p:nvPr/>
+          </p:nvSpPr>
+          <p:spPr>
+            <a:xfrm>
+              <a:off x="2286608" y="5443829"/>
+              <a:ext cx="148315" cy="95463"/>
             </a:xfrm>
             <a:prstGeom prst="rect">
               <a:avLst/>
@@ -4120,7 +4249,7 @@
                 </a:spcAft>
               </a:pPr>
               <a:r>
-                <a:rPr sz="880" i="0" b="0">
+                <a:rPr sz="1050" i="0" b="0">
                   <a:solidFill>
                     <a:srgbClr val="000000">
                       <a:alpha val="100000"/>
@@ -4136,14 +4265,14 @@
         </p:sp>
         <p:sp>
           <p:nvSpPr>
-            <p:cNvPr id="55" name="tx55"/>
-            <p:cNvSpPr/>
-            <p:nvPr/>
-          </p:nvSpPr>
-          <p:spPr>
-            <a:xfrm>
-              <a:off x="2974322" y="5485343"/>
-              <a:ext cx="124358" cy="80010"/>
+            <p:cNvPr id="58" name="tx58"/>
+            <p:cNvSpPr/>
+            <p:nvPr/>
+          </p:nvSpPr>
+          <p:spPr>
+            <a:xfrm>
+              <a:off x="2988414" y="5443829"/>
+              <a:ext cx="148315" cy="95463"/>
             </a:xfrm>
             <a:prstGeom prst="rect">
               <a:avLst/>
@@ -4163,7 +4292,7 @@
                 </a:spcAft>
               </a:pPr>
               <a:r>
-                <a:rPr sz="880" i="0" b="0">
+                <a:rPr sz="1050" i="0" b="0">
                   <a:solidFill>
                     <a:srgbClr val="000000">
                       <a:alpha val="100000"/>
@@ -4179,14 +4308,14 @@
         </p:sp>
         <p:sp>
           <p:nvSpPr>
-            <p:cNvPr id="56" name="tx56"/>
-            <p:cNvSpPr/>
-            <p:nvPr/>
-          </p:nvSpPr>
-          <p:spPr>
-            <a:xfrm>
-              <a:off x="3682824" y="5485343"/>
-              <a:ext cx="124358" cy="80010"/>
+            <p:cNvPr id="59" name="tx59"/>
+            <p:cNvSpPr/>
+            <p:nvPr/>
+          </p:nvSpPr>
+          <p:spPr>
+            <a:xfrm>
+              <a:off x="3690220" y="5443829"/>
+              <a:ext cx="148315" cy="95463"/>
             </a:xfrm>
             <a:prstGeom prst="rect">
               <a:avLst/>
@@ -4206,7 +4335,7 @@
                 </a:spcAft>
               </a:pPr>
               <a:r>
-                <a:rPr sz="880" i="0" b="0">
+                <a:rPr sz="1050" i="0" b="0">
                   <a:solidFill>
                     <a:srgbClr val="000000">
                       <a:alpha val="100000"/>
@@ -4222,14 +4351,14 @@
         </p:sp>
         <p:sp>
           <p:nvSpPr>
-            <p:cNvPr id="57" name="tx57"/>
-            <p:cNvSpPr/>
-            <p:nvPr/>
-          </p:nvSpPr>
-          <p:spPr>
-            <a:xfrm>
-              <a:off x="4391326" y="5485343"/>
-              <a:ext cx="124358" cy="80010"/>
+            <p:cNvPr id="60" name="tx60"/>
+            <p:cNvSpPr/>
+            <p:nvPr/>
+          </p:nvSpPr>
+          <p:spPr>
+            <a:xfrm>
+              <a:off x="4392026" y="5443829"/>
+              <a:ext cx="148315" cy="95463"/>
             </a:xfrm>
             <a:prstGeom prst="rect">
               <a:avLst/>
@@ -4249,7 +4378,7 @@
                 </a:spcAft>
               </a:pPr>
               <a:r>
-                <a:rPr sz="880" i="0" b="0">
+                <a:rPr sz="1050" i="0" b="0">
                   <a:solidFill>
                     <a:srgbClr val="000000">
                       <a:alpha val="100000"/>
@@ -4265,14 +4394,14 @@
         </p:sp>
         <p:sp>
           <p:nvSpPr>
-            <p:cNvPr id="58" name="tx58"/>
-            <p:cNvSpPr/>
-            <p:nvPr/>
-          </p:nvSpPr>
-          <p:spPr>
-            <a:xfrm>
-              <a:off x="5124745" y="5485343"/>
-              <a:ext cx="74523" cy="80010"/>
+            <p:cNvPr id="61" name="tx61"/>
+            <p:cNvSpPr/>
+            <p:nvPr/>
+          </p:nvSpPr>
+          <p:spPr>
+            <a:xfrm>
+              <a:off x="5123550" y="5443829"/>
+              <a:ext cx="88879" cy="95463"/>
             </a:xfrm>
             <a:prstGeom prst="rect">
               <a:avLst/>
@@ -4292,7 +4421,7 @@
                 </a:spcAft>
               </a:pPr>
               <a:r>
-                <a:rPr sz="880" i="0" b="0">
+                <a:rPr sz="1050" i="0" b="0">
                   <a:solidFill>
                     <a:srgbClr val="000000">
                       <a:alpha val="100000"/>
@@ -4308,14 +4437,14 @@
         </p:sp>
         <p:sp>
           <p:nvSpPr>
-            <p:cNvPr id="59" name="tx59"/>
-            <p:cNvSpPr/>
-            <p:nvPr/>
-          </p:nvSpPr>
-          <p:spPr>
-            <a:xfrm>
-              <a:off x="2355988" y="5623648"/>
-              <a:ext cx="1095085" cy="100035"/>
+            <p:cNvPr id="62" name="tx62"/>
+            <p:cNvSpPr/>
+            <p:nvPr/>
+          </p:nvSpPr>
+          <p:spPr>
+            <a:xfrm>
+              <a:off x="2238373" y="5602159"/>
+              <a:ext cx="1243858" cy="113659"/>
             </a:xfrm>
             <a:prstGeom prst="rect">
               <a:avLst/>
@@ -4335,7 +4464,7 @@
                 </a:spcAft>
               </a:pPr>
               <a:r>
-                <a:rPr sz="1100" i="1" b="0">
+                <a:rPr sz="1250" i="1" b="0">
                   <a:solidFill>
                     <a:srgbClr val="000000">
                       <a:alpha val="100000"/>
@@ -4351,14 +4480,14 @@
         </p:sp>
         <p:sp>
           <p:nvSpPr>
-            <p:cNvPr id="60" name="tx60"/>
-            <p:cNvSpPr/>
-            <p:nvPr/>
-          </p:nvSpPr>
-          <p:spPr>
-            <a:xfrm>
-              <a:off x="3462197" y="5623648"/>
-              <a:ext cx="963320" cy="100035"/>
+            <p:cNvPr id="63" name="tx63"/>
+            <p:cNvSpPr/>
+            <p:nvPr/>
+          </p:nvSpPr>
+          <p:spPr>
+            <a:xfrm>
+              <a:off x="3494864" y="5602159"/>
+              <a:ext cx="1093713" cy="113659"/>
             </a:xfrm>
             <a:prstGeom prst="rect">
               <a:avLst/>
@@ -4378,7 +4507,7 @@
                 </a:spcAft>
               </a:pPr>
               <a:r>
-                <a:rPr sz="1100" i="0" b="0">
+                <a:rPr sz="1250" i="0" b="0">
                   <a:solidFill>
                     <a:srgbClr val="000000">
                       <a:alpha val="100000"/>
@@ -4394,14 +4523,14 @@
         </p:sp>
         <p:sp>
           <p:nvSpPr>
-            <p:cNvPr id="61" name="tx61"/>
+            <p:cNvPr id="64" name="tx64"/>
             <p:cNvSpPr/>
             <p:nvPr/>
           </p:nvSpPr>
           <p:spPr>
             <a:xfrm rot="-5400000">
-              <a:off x="353702" y="3679152"/>
-              <a:ext cx="1020013" cy="100035"/>
+              <a:off x="289237" y="3719637"/>
+              <a:ext cx="1158636" cy="113659"/>
             </a:xfrm>
             <a:prstGeom prst="rect">
               <a:avLst/>
@@ -4421,7 +4550,7 @@
                 </a:spcAft>
               </a:pPr>
               <a:r>
-                <a:rPr sz="1100" i="1" b="0">
+                <a:rPr sz="1250" i="1" b="0">
                   <a:solidFill>
                     <a:srgbClr val="000000">
                       <a:alpha val="100000"/>
@@ -4437,14 +4566,14 @@
         </p:sp>
         <p:sp>
           <p:nvSpPr>
-            <p:cNvPr id="62" name="tx62"/>
+            <p:cNvPr id="65" name="tx65"/>
             <p:cNvSpPr/>
             <p:nvPr/>
           </p:nvSpPr>
           <p:spPr>
             <a:xfrm rot="-5400000">
-              <a:off x="366458" y="2660771"/>
-              <a:ext cx="994501" cy="100035"/>
+              <a:off x="304005" y="2563136"/>
+              <a:ext cx="1129101" cy="113659"/>
             </a:xfrm>
             <a:prstGeom prst="rect">
               <a:avLst/>
@@ -4464,7 +4593,7 @@
                 </a:spcAft>
               </a:pPr>
               <a:r>
-                <a:rPr sz="1100" i="0" b="0">
+                <a:rPr sz="1250" i="0" b="0">
                   <a:solidFill>
                     <a:srgbClr val="000000">
                       <a:alpha val="100000"/>
@@ -4480,13 +4609,13 @@
         </p:sp>
         <p:sp>
           <p:nvSpPr>
-            <p:cNvPr id="63" name="tx63"/>
-            <p:cNvSpPr/>
-            <p:nvPr/>
-          </p:nvSpPr>
-          <p:spPr>
-            <a:xfrm>
-              <a:off x="1590752" y="151156"/>
+            <p:cNvPr id="66" name="tx66"/>
+            <p:cNvSpPr/>
+            <p:nvPr/>
+          </p:nvSpPr>
+          <p:spPr>
+            <a:xfrm>
+              <a:off x="1613475" y="151156"/>
               <a:ext cx="641725" cy="81838"/>
             </a:xfrm>
             <a:prstGeom prst="rect">
@@ -4523,13 +4652,13 @@
         </p:sp>
         <p:sp>
           <p:nvSpPr>
-            <p:cNvPr id="64" name="tx64"/>
-            <p:cNvSpPr/>
-            <p:nvPr/>
-          </p:nvSpPr>
-          <p:spPr>
-            <a:xfrm>
-              <a:off x="1590752" y="274600"/>
+            <p:cNvPr id="67" name="tx67"/>
+            <p:cNvSpPr/>
+            <p:nvPr/>
+          </p:nvSpPr>
+          <p:spPr>
+            <a:xfrm>
+              <a:off x="1613475" y="274600"/>
               <a:ext cx="616214" cy="81838"/>
             </a:xfrm>
             <a:prstGeom prst="rect">
@@ -4566,7 +4695,7 @@
         </p:sp>
         <p:pic>
           <p:nvPicPr>
-            <p:cNvPr id="65" name="pic65"/>
+            <p:cNvPr id="68" name="pic68"/>
             <p:cNvPicPr/>
             <p:nvPr/>
           </p:nvPicPr>
@@ -4578,7 +4707,7 @@
           </p:blipFill>
           <p:spPr>
             <a:xfrm>
-              <a:off x="1590752" y="438007"/>
+              <a:off x="1613475" y="438007"/>
               <a:ext cx="3600000" cy="219455"/>
             </a:xfrm>
             <a:prstGeom prst="rect">
@@ -4588,13 +4717,13 @@
         </p:pic>
         <p:sp>
           <p:nvSpPr>
-            <p:cNvPr id="66" name="pl66"/>
-            <p:cNvSpPr/>
-            <p:nvPr/>
-          </p:nvSpPr>
-          <p:spPr>
-            <a:xfrm>
-              <a:off x="1596752" y="613572"/>
+            <p:cNvPr id="69" name="pl69"/>
+            <p:cNvSpPr/>
+            <p:nvPr/>
+          </p:nvSpPr>
+          <p:spPr>
+            <a:xfrm>
+              <a:off x="1619475" y="613572"/>
               <a:ext cx="0" cy="43891"/>
             </a:xfrm>
             <a:custGeom>
@@ -4628,13 +4757,13 @@
         </p:sp>
         <p:sp>
           <p:nvSpPr>
-            <p:cNvPr id="67" name="pl67"/>
-            <p:cNvSpPr/>
-            <p:nvPr/>
-          </p:nvSpPr>
-          <p:spPr>
-            <a:xfrm>
-              <a:off x="2280918" y="613572"/>
+            <p:cNvPr id="70" name="pl70"/>
+            <p:cNvSpPr/>
+            <p:nvPr/>
+          </p:nvSpPr>
+          <p:spPr>
+            <a:xfrm>
+              <a:off x="2303641" y="613572"/>
               <a:ext cx="0" cy="43891"/>
             </a:xfrm>
             <a:custGeom>
@@ -4668,13 +4797,13 @@
         </p:sp>
         <p:sp>
           <p:nvSpPr>
-            <p:cNvPr id="68" name="pl68"/>
-            <p:cNvSpPr/>
-            <p:nvPr/>
-          </p:nvSpPr>
-          <p:spPr>
-            <a:xfrm>
-              <a:off x="2965084" y="613572"/>
+            <p:cNvPr id="71" name="pl71"/>
+            <p:cNvSpPr/>
+            <p:nvPr/>
+          </p:nvSpPr>
+          <p:spPr>
+            <a:xfrm>
+              <a:off x="2987807" y="613572"/>
               <a:ext cx="0" cy="43891"/>
             </a:xfrm>
             <a:custGeom>
@@ -4708,13 +4837,13 @@
         </p:sp>
         <p:sp>
           <p:nvSpPr>
-            <p:cNvPr id="69" name="pl69"/>
-            <p:cNvSpPr/>
-            <p:nvPr/>
-          </p:nvSpPr>
-          <p:spPr>
-            <a:xfrm>
-              <a:off x="3649250" y="613572"/>
+            <p:cNvPr id="72" name="pl72"/>
+            <p:cNvSpPr/>
+            <p:nvPr/>
+          </p:nvSpPr>
+          <p:spPr>
+            <a:xfrm>
+              <a:off x="3671973" y="613572"/>
               <a:ext cx="0" cy="43891"/>
             </a:xfrm>
             <a:custGeom>
@@ -4748,13 +4877,13 @@
         </p:sp>
         <p:sp>
           <p:nvSpPr>
-            <p:cNvPr id="70" name="pl70"/>
-            <p:cNvSpPr/>
-            <p:nvPr/>
-          </p:nvSpPr>
-          <p:spPr>
-            <a:xfrm>
-              <a:off x="4333416" y="613572"/>
+            <p:cNvPr id="73" name="pl73"/>
+            <p:cNvSpPr/>
+            <p:nvPr/>
+          </p:nvSpPr>
+          <p:spPr>
+            <a:xfrm>
+              <a:off x="4356139" y="613572"/>
               <a:ext cx="0" cy="43891"/>
             </a:xfrm>
             <a:custGeom>
@@ -4788,13 +4917,13 @@
         </p:sp>
         <p:sp>
           <p:nvSpPr>
-            <p:cNvPr id="71" name="pl71"/>
-            <p:cNvSpPr/>
-            <p:nvPr/>
-          </p:nvSpPr>
-          <p:spPr>
-            <a:xfrm>
-              <a:off x="5017582" y="613572"/>
+            <p:cNvPr id="74" name="pl74"/>
+            <p:cNvSpPr/>
+            <p:nvPr/>
+          </p:nvSpPr>
+          <p:spPr>
+            <a:xfrm>
+              <a:off x="5040304" y="613572"/>
               <a:ext cx="0" cy="43891"/>
             </a:xfrm>
             <a:custGeom>
@@ -4828,13 +4957,13 @@
         </p:sp>
         <p:sp>
           <p:nvSpPr>
-            <p:cNvPr id="72" name="pl72"/>
-            <p:cNvSpPr/>
-            <p:nvPr/>
-          </p:nvSpPr>
-          <p:spPr>
-            <a:xfrm>
-              <a:off x="1596752" y="438007"/>
+            <p:cNvPr id="75" name="pl75"/>
+            <p:cNvSpPr/>
+            <p:nvPr/>
+          </p:nvSpPr>
+          <p:spPr>
+            <a:xfrm>
+              <a:off x="1619475" y="438007"/>
               <a:ext cx="0" cy="43891"/>
             </a:xfrm>
             <a:custGeom>
@@ -4868,13 +4997,13 @@
         </p:sp>
         <p:sp>
           <p:nvSpPr>
-            <p:cNvPr id="73" name="pl73"/>
-            <p:cNvSpPr/>
-            <p:nvPr/>
-          </p:nvSpPr>
-          <p:spPr>
-            <a:xfrm>
-              <a:off x="2280918" y="438007"/>
+            <p:cNvPr id="76" name="pl76"/>
+            <p:cNvSpPr/>
+            <p:nvPr/>
+          </p:nvSpPr>
+          <p:spPr>
+            <a:xfrm>
+              <a:off x="2303641" y="438007"/>
               <a:ext cx="0" cy="43891"/>
             </a:xfrm>
             <a:custGeom>
@@ -4908,13 +5037,13 @@
         </p:sp>
         <p:sp>
           <p:nvSpPr>
-            <p:cNvPr id="74" name="pl74"/>
-            <p:cNvSpPr/>
-            <p:nvPr/>
-          </p:nvSpPr>
-          <p:spPr>
-            <a:xfrm>
-              <a:off x="2965084" y="438007"/>
+            <p:cNvPr id="77" name="pl77"/>
+            <p:cNvSpPr/>
+            <p:nvPr/>
+          </p:nvSpPr>
+          <p:spPr>
+            <a:xfrm>
+              <a:off x="2987807" y="438007"/>
               <a:ext cx="0" cy="43891"/>
             </a:xfrm>
             <a:custGeom>
@@ -4948,13 +5077,13 @@
         </p:sp>
         <p:sp>
           <p:nvSpPr>
-            <p:cNvPr id="75" name="pl75"/>
-            <p:cNvSpPr/>
-            <p:nvPr/>
-          </p:nvSpPr>
-          <p:spPr>
-            <a:xfrm>
-              <a:off x="3649250" y="438007"/>
+            <p:cNvPr id="78" name="pl78"/>
+            <p:cNvSpPr/>
+            <p:nvPr/>
+          </p:nvSpPr>
+          <p:spPr>
+            <a:xfrm>
+              <a:off x="3671973" y="438007"/>
               <a:ext cx="0" cy="43891"/>
             </a:xfrm>
             <a:custGeom>
@@ -4988,13 +5117,13 @@
         </p:sp>
         <p:sp>
           <p:nvSpPr>
-            <p:cNvPr id="76" name="pl76"/>
-            <p:cNvSpPr/>
-            <p:nvPr/>
-          </p:nvSpPr>
-          <p:spPr>
-            <a:xfrm>
-              <a:off x="4333416" y="438007"/>
+            <p:cNvPr id="79" name="pl79"/>
+            <p:cNvSpPr/>
+            <p:nvPr/>
+          </p:nvSpPr>
+          <p:spPr>
+            <a:xfrm>
+              <a:off x="4356139" y="438007"/>
               <a:ext cx="0" cy="43891"/>
             </a:xfrm>
             <a:custGeom>
@@ -5028,13 +5157,13 @@
         </p:sp>
         <p:sp>
           <p:nvSpPr>
-            <p:cNvPr id="77" name="pl77"/>
-            <p:cNvSpPr/>
-            <p:nvPr/>
-          </p:nvSpPr>
-          <p:spPr>
-            <a:xfrm>
-              <a:off x="5017582" y="438007"/>
+            <p:cNvPr id="80" name="pl80"/>
+            <p:cNvSpPr/>
+            <p:nvPr/>
+          </p:nvSpPr>
+          <p:spPr>
+            <a:xfrm>
+              <a:off x="5040304" y="438007"/>
               <a:ext cx="0" cy="43891"/>
             </a:xfrm>
             <a:custGeom>
@@ -5068,13 +5197,13 @@
         </p:sp>
         <p:sp>
           <p:nvSpPr>
-            <p:cNvPr id="78" name="tx78"/>
-            <p:cNvSpPr/>
-            <p:nvPr/>
-          </p:nvSpPr>
-          <p:spPr>
-            <a:xfrm>
-              <a:off x="1526115" y="727052"/>
+            <p:cNvPr id="81" name="tx81"/>
+            <p:cNvSpPr/>
+            <p:nvPr/>
+          </p:nvSpPr>
+          <p:spPr>
+            <a:xfrm>
+              <a:off x="1548838" y="727052"/>
               <a:ext cx="141274" cy="72786"/>
             </a:xfrm>
             <a:prstGeom prst="rect">
@@ -5111,13 +5240,13 @@
         </p:sp>
         <p:sp>
           <p:nvSpPr>
-            <p:cNvPr id="79" name="tx79"/>
-            <p:cNvSpPr/>
-            <p:nvPr/>
-          </p:nvSpPr>
-          <p:spPr>
-            <a:xfrm>
-              <a:off x="2210281" y="727052"/>
+            <p:cNvPr id="82" name="tx82"/>
+            <p:cNvSpPr/>
+            <p:nvPr/>
+          </p:nvSpPr>
+          <p:spPr>
+            <a:xfrm>
+              <a:off x="2233004" y="727052"/>
               <a:ext cx="141274" cy="72786"/>
             </a:xfrm>
             <a:prstGeom prst="rect">
@@ -5154,13 +5283,13 @@
         </p:sp>
         <p:sp>
           <p:nvSpPr>
-            <p:cNvPr id="80" name="tx80"/>
-            <p:cNvSpPr/>
-            <p:nvPr/>
-          </p:nvSpPr>
-          <p:spPr>
-            <a:xfrm>
-              <a:off x="2894447" y="727052"/>
+            <p:cNvPr id="83" name="tx83"/>
+            <p:cNvSpPr/>
+            <p:nvPr/>
+          </p:nvSpPr>
+          <p:spPr>
+            <a:xfrm>
+              <a:off x="2917169" y="727052"/>
               <a:ext cx="141274" cy="72786"/>
             </a:xfrm>
             <a:prstGeom prst="rect">
@@ -5197,13 +5326,13 @@
         </p:sp>
         <p:sp>
           <p:nvSpPr>
-            <p:cNvPr id="81" name="tx81"/>
-            <p:cNvSpPr/>
-            <p:nvPr/>
-          </p:nvSpPr>
-          <p:spPr>
-            <a:xfrm>
-              <a:off x="3578612" y="727052"/>
+            <p:cNvPr id="84" name="tx84"/>
+            <p:cNvSpPr/>
+            <p:nvPr/>
+          </p:nvSpPr>
+          <p:spPr>
+            <a:xfrm>
+              <a:off x="3601335" y="727052"/>
               <a:ext cx="141274" cy="72786"/>
             </a:xfrm>
             <a:prstGeom prst="rect">
@@ -5240,13 +5369,13 @@
         </p:sp>
         <p:sp>
           <p:nvSpPr>
-            <p:cNvPr id="82" name="tx82"/>
-            <p:cNvSpPr/>
-            <p:nvPr/>
-          </p:nvSpPr>
-          <p:spPr>
-            <a:xfrm>
-              <a:off x="4262778" y="727052"/>
+            <p:cNvPr id="85" name="tx85"/>
+            <p:cNvSpPr/>
+            <p:nvPr/>
+          </p:nvSpPr>
+          <p:spPr>
+            <a:xfrm>
+              <a:off x="4285501" y="727052"/>
               <a:ext cx="141274" cy="72786"/>
             </a:xfrm>
             <a:prstGeom prst="rect">
@@ -5283,13 +5412,13 @@
         </p:sp>
         <p:sp>
           <p:nvSpPr>
-            <p:cNvPr id="83" name="tx83"/>
-            <p:cNvSpPr/>
-            <p:nvPr/>
-          </p:nvSpPr>
-          <p:spPr>
-            <a:xfrm>
-              <a:off x="4946944" y="727052"/>
+            <p:cNvPr id="86" name="tx86"/>
+            <p:cNvSpPr/>
+            <p:nvPr/>
+          </p:nvSpPr>
+          <p:spPr>
+            <a:xfrm>
+              <a:off x="4969667" y="727052"/>
               <a:ext cx="141274" cy="72786"/>
             </a:xfrm>
             <a:prstGeom prst="rect">
